--- a/WDL PPT.pptx
+++ b/WDL PPT.pptx
@@ -115,6 +115,11 @@
       </a:defRPr>
     </a:lvl9pPr>
   </p:defaultTextStyle>
+  <p:extLst>
+    <p:ext uri="{EFAFB233-063F-42B5-8137-9DF3F51BA10A}">
+      <p15:sldGuideLst xmlns:p15="http://schemas.microsoft.com/office/powerpoint/2012/main"/>
+    </p:ext>
+  </p:extLst>
 </p:presentation>
 </file>
 
@@ -1986,378 +1991,6 @@
 
 <file path=ppt/slideLayouts/slideLayout3.xml><?xml version="1.0" encoding="utf-8"?>
 <p:sldLayout xmlns:a="http://schemas.openxmlformats.org/drawingml/2006/main" xmlns:r="http://schemas.openxmlformats.org/officeDocument/2006/relationships" xmlns:p="http://schemas.openxmlformats.org/presentationml/2006/main">
-  <p:cSld name="Title and Body">
-    <p:spTree>
-      <p:nvGrpSpPr>
-        <p:cNvPr id="1" name=""/>
-        <p:cNvGrpSpPr/>
-        <p:nvPr/>
-      </p:nvGrpSpPr>
-      <p:grpSpPr>
-        <a:xfrm>
-          <a:off x="0" y="0"/>
-          <a:ext cx="0" cy="0"/>
-          <a:chOff x="0" y="0"/>
-          <a:chExt cx="0" cy="0"/>
-        </a:xfrm>
-      </p:grpSpPr>
-      <p:sp>
-        <p:nvSpPr>
-          <p:cNvPr id="4" name="Accent rule">
-            <a:extLst>
-              <a:ext uri="{FF2B5EF4-FFF2-40B4-BE49-F238E27FC236}">
-                <a16:creationId xmlns:a16="http://schemas.microsoft.com/office/drawing/2014/main" id="{0DF56DE9-8723-4EF3-9584-0D0B9D70FDBD}"/>
-              </a:ext>
-            </a:extLst>
-          </p:cNvPr>
-          <p:cNvSpPr>
-            <a:spLocks noGrp="1"/>
-          </p:cNvSpPr>
-          <p:nvPr/>
-        </p:nvSpPr>
-        <p:spPr>
-          <a:xfrm>
-            <a:off x="685800" y="1524000"/>
-            <a:ext cx="609600" cy="38100"/>
-          </a:xfrm>
-          <a:prstGeom prst="rect">
-            <a:avLst/>
-          </a:prstGeom>
-          <a:solidFill>
-            <a:schemeClr val="accent1"/>
-          </a:solidFill>
-          <a:ln>
-            <a:noFill/>
-            <a:prstDash val="solid"/>
-          </a:ln>
-        </p:spPr>
-      </p:sp>
-      <p:sp>
-        <p:nvSpPr>
-          <p:cNvPr id="2" name="Title">
-            <a:extLst>
-              <a:ext uri="{FF2B5EF4-FFF2-40B4-BE49-F238E27FC236}">
-                <a16:creationId xmlns:a16="http://schemas.microsoft.com/office/drawing/2014/main" id="{98363A42-401A-4319-8423-35D346C5993F}"/>
-              </a:ext>
-            </a:extLst>
-          </p:cNvPr>
-          <p:cNvSpPr>
-            <a:spLocks noGrp="1"/>
-          </p:cNvSpPr>
-          <p:nvPr>
-            <p:ph type="title"/>
-          </p:nvPr>
-        </p:nvSpPr>
-        <p:spPr>
-          <a:xfrm>
-            <a:off x="685800" y="533400"/>
-            <a:ext cx="10820400" cy="838200"/>
-          </a:xfrm>
-          <a:prstGeom prst="rect">
-            <a:avLst/>
-          </a:prstGeom>
-          <a:noFill/>
-          <a:ln>
-            <a:noFill/>
-            <a:prstDash val="solid"/>
-          </a:ln>
-        </p:spPr>
-        <p:txBody>
-          <a:bodyPr wrap="square" lIns="0" tIns="0" rIns="0" bIns="0" anchor="t">
-            <a:normAutofit/>
-          </a:bodyPr>
-          <a:lstStyle>
-            <a:lvl1pPr marL="0" indent="0">
-              <a:lnSpc>
-                <a:spcPct val="110000"/>
-              </a:lnSpc>
-              <a:spcBef>
-                <a:spcPts val="0"/>
-              </a:spcBef>
-              <a:spcAft>
-                <a:spcPts val="0"/>
-              </a:spcAft>
-              <a:buNone/>
-              <a:defRPr/>
-            </a:lvl1pPr>
-            <a:lvl2pPr marL="0" indent="0">
-              <a:lnSpc>
-                <a:spcPct val="110000"/>
-              </a:lnSpc>
-              <a:spcBef>
-                <a:spcPts val="0"/>
-              </a:spcBef>
-              <a:spcAft>
-                <a:spcPts val="0"/>
-              </a:spcAft>
-              <a:buNone/>
-              <a:defRPr/>
-            </a:lvl2pPr>
-            <a:lvl3pPr marL="0" indent="0">
-              <a:lnSpc>
-                <a:spcPct val="110000"/>
-              </a:lnSpc>
-              <a:spcBef>
-                <a:spcPts val="0"/>
-              </a:spcBef>
-              <a:spcAft>
-                <a:spcPts val="0"/>
-              </a:spcAft>
-              <a:buNone/>
-              <a:defRPr/>
-            </a:lvl3pPr>
-            <a:lvl4pPr marL="0" indent="0">
-              <a:lnSpc>
-                <a:spcPct val="110000"/>
-              </a:lnSpc>
-              <a:spcBef>
-                <a:spcPts val="0"/>
-              </a:spcBef>
-              <a:spcAft>
-                <a:spcPts val="0"/>
-              </a:spcAft>
-              <a:buNone/>
-              <a:defRPr/>
-            </a:lvl4pPr>
-            <a:lvl5pPr marL="0" indent="0">
-              <a:lnSpc>
-                <a:spcPct val="110000"/>
-              </a:lnSpc>
-              <a:spcBef>
-                <a:spcPts val="0"/>
-              </a:spcBef>
-              <a:spcAft>
-                <a:spcPts val="0"/>
-              </a:spcAft>
-              <a:buNone/>
-              <a:defRPr/>
-            </a:lvl5pPr>
-            <a:lvl6pPr marL="0" indent="0">
-              <a:lnSpc>
-                <a:spcPct val="110000"/>
-              </a:lnSpc>
-              <a:spcBef>
-                <a:spcPts val="0"/>
-              </a:spcBef>
-              <a:spcAft>
-                <a:spcPts val="0"/>
-              </a:spcAft>
-              <a:buNone/>
-              <a:defRPr/>
-            </a:lvl6pPr>
-            <a:lvl7pPr marL="0" indent="0">
-              <a:lnSpc>
-                <a:spcPct val="110000"/>
-              </a:lnSpc>
-              <a:spcBef>
-                <a:spcPts val="0"/>
-              </a:spcBef>
-              <a:spcAft>
-                <a:spcPts val="0"/>
-              </a:spcAft>
-              <a:buNone/>
-              <a:defRPr/>
-            </a:lvl7pPr>
-            <a:lvl8pPr marL="0" indent="0">
-              <a:lnSpc>
-                <a:spcPct val="110000"/>
-              </a:lnSpc>
-              <a:spcBef>
-                <a:spcPts val="0"/>
-              </a:spcBef>
-              <a:spcAft>
-                <a:spcPts val="0"/>
-              </a:spcAft>
-              <a:buNone/>
-              <a:defRPr/>
-            </a:lvl8pPr>
-            <a:lvl9pPr marL="0" indent="0">
-              <a:lnSpc>
-                <a:spcPct val="110000"/>
-              </a:lnSpc>
-              <a:spcBef>
-                <a:spcPts val="0"/>
-              </a:spcBef>
-              <a:spcAft>
-                <a:spcPts val="0"/>
-              </a:spcAft>
-              <a:buNone/>
-              <a:defRPr/>
-            </a:lvl9pPr>
-          </a:lstStyle>
-          <a:p>
-            <a:endParaRPr/>
-          </a:p>
-        </p:txBody>
-      </p:sp>
-      <p:sp>
-        <p:nvSpPr>
-          <p:cNvPr id="3" name="Body">
-            <a:extLst>
-              <a:ext uri="{FF2B5EF4-FFF2-40B4-BE49-F238E27FC236}">
-                <a16:creationId xmlns:a16="http://schemas.microsoft.com/office/drawing/2014/main" id="{E9233E5D-67EE-4923-B62E-BEEC67F2BC40}"/>
-              </a:ext>
-            </a:extLst>
-          </p:cNvPr>
-          <p:cNvSpPr>
-            <a:spLocks noGrp="1"/>
-          </p:cNvSpPr>
-          <p:nvPr>
-            <p:ph type="body" idx="1"/>
-          </p:nvPr>
-        </p:nvSpPr>
-        <p:spPr>
-          <a:xfrm>
-            <a:off x="685800" y="1905000"/>
-            <a:ext cx="10820400" cy="4267200"/>
-          </a:xfrm>
-          <a:prstGeom prst="rect">
-            <a:avLst/>
-          </a:prstGeom>
-          <a:noFill/>
-          <a:ln>
-            <a:noFill/>
-            <a:prstDash val="solid"/>
-          </a:ln>
-        </p:spPr>
-        <p:txBody>
-          <a:bodyPr wrap="square" lIns="0" tIns="0" rIns="0" bIns="0" anchor="t">
-            <a:normAutofit/>
-          </a:bodyPr>
-          <a:lstStyle>
-            <a:lvl1pPr marL="228600" indent="-228600">
-              <a:lnSpc>
-                <a:spcPct val="110000"/>
-              </a:lnSpc>
-              <a:spcBef>
-                <a:spcPts val="0"/>
-              </a:spcBef>
-              <a:spcAft>
-                <a:spcPts val="1200"/>
-              </a:spcAft>
-              <a:buChar char="•"/>
-              <a:defRPr/>
-            </a:lvl1pPr>
-            <a:lvl2pPr marL="533400" indent="-228600">
-              <a:lnSpc>
-                <a:spcPct val="110000"/>
-              </a:lnSpc>
-              <a:spcBef>
-                <a:spcPts val="0"/>
-              </a:spcBef>
-              <a:spcAft>
-                <a:spcPts val="1200"/>
-              </a:spcAft>
-              <a:buChar char="•"/>
-              <a:defRPr/>
-            </a:lvl2pPr>
-            <a:lvl3pPr marL="838200" indent="-228600">
-              <a:lnSpc>
-                <a:spcPct val="110000"/>
-              </a:lnSpc>
-              <a:spcBef>
-                <a:spcPts val="0"/>
-              </a:spcBef>
-              <a:spcAft>
-                <a:spcPts val="1200"/>
-              </a:spcAft>
-              <a:buChar char="•"/>
-              <a:defRPr/>
-            </a:lvl3pPr>
-            <a:lvl4pPr marL="1143000" indent="-228600">
-              <a:lnSpc>
-                <a:spcPct val="110000"/>
-              </a:lnSpc>
-              <a:spcBef>
-                <a:spcPts val="0"/>
-              </a:spcBef>
-              <a:spcAft>
-                <a:spcPts val="1200"/>
-              </a:spcAft>
-              <a:buChar char="•"/>
-              <a:defRPr/>
-            </a:lvl4pPr>
-            <a:lvl5pPr marL="1447800" indent="-228600">
-              <a:lnSpc>
-                <a:spcPct val="110000"/>
-              </a:lnSpc>
-              <a:spcBef>
-                <a:spcPts val="0"/>
-              </a:spcBef>
-              <a:spcAft>
-                <a:spcPts val="1200"/>
-              </a:spcAft>
-              <a:buChar char="•"/>
-              <a:defRPr/>
-            </a:lvl5pPr>
-            <a:lvl6pPr marL="1752600" indent="-228600">
-              <a:lnSpc>
-                <a:spcPct val="110000"/>
-              </a:lnSpc>
-              <a:spcBef>
-                <a:spcPts val="0"/>
-              </a:spcBef>
-              <a:spcAft>
-                <a:spcPts val="1200"/>
-              </a:spcAft>
-              <a:buChar char="•"/>
-              <a:defRPr/>
-            </a:lvl6pPr>
-            <a:lvl7pPr marL="2057400" indent="-228600">
-              <a:lnSpc>
-                <a:spcPct val="110000"/>
-              </a:lnSpc>
-              <a:spcBef>
-                <a:spcPts val="0"/>
-              </a:spcBef>
-              <a:spcAft>
-                <a:spcPts val="1200"/>
-              </a:spcAft>
-              <a:buChar char="•"/>
-              <a:defRPr/>
-            </a:lvl7pPr>
-            <a:lvl8pPr marL="2362200" indent="-228600">
-              <a:lnSpc>
-                <a:spcPct val="110000"/>
-              </a:lnSpc>
-              <a:spcBef>
-                <a:spcPts val="0"/>
-              </a:spcBef>
-              <a:spcAft>
-                <a:spcPts val="1200"/>
-              </a:spcAft>
-              <a:buChar char="•"/>
-              <a:defRPr/>
-            </a:lvl8pPr>
-            <a:lvl9pPr marL="2667000" indent="-228600">
-              <a:lnSpc>
-                <a:spcPct val="110000"/>
-              </a:lnSpc>
-              <a:spcBef>
-                <a:spcPts val="0"/>
-              </a:spcBef>
-              <a:spcAft>
-                <a:spcPts val="1200"/>
-              </a:spcAft>
-              <a:buChar char="•"/>
-              <a:defRPr/>
-            </a:lvl9pPr>
-          </a:lstStyle>
-          <a:p>
-            <a:endParaRPr/>
-          </a:p>
-        </p:txBody>
-      </p:sp>
-    </p:spTree>
-  </p:cSld>
-  <p:clrMapOvr>
-    <a:masterClrMapping/>
-  </p:clrMapOvr>
-</p:sldLayout>
-</file>
-
-<file path=ppt/slideLayouts/slideLayout4.xml><?xml version="1.0" encoding="utf-8"?>
-<p:sldLayout xmlns:a="http://schemas.openxmlformats.org/drawingml/2006/main" xmlns:r="http://schemas.openxmlformats.org/officeDocument/2006/relationships" xmlns:p="http://schemas.openxmlformats.org/presentationml/2006/main">
   <p:cSld name="Title and Two Column">
     <p:spTree>
       <p:nvGrpSpPr>
@@ -2886,7 +2519,7 @@
 </p:sldLayout>
 </file>
 
-<file path=ppt/slideLayouts/slideLayout5.xml><?xml version="1.0" encoding="utf-8"?>
+<file path=ppt/slideLayouts/slideLayout4.xml><?xml version="1.0" encoding="utf-8"?>
 <p:sldLayout xmlns:a="http://schemas.openxmlformats.org/drawingml/2006/main" xmlns:r="http://schemas.openxmlformats.org/officeDocument/2006/relationships" xmlns:p="http://schemas.openxmlformats.org/presentationml/2006/main">
   <p:cSld name="Title and One Column">
     <p:spTree>
@@ -3258,7 +2891,7 @@
 </p:sldLayout>
 </file>
 
-<file path=ppt/slideLayouts/slideLayout6.xml><?xml version="1.0" encoding="utf-8"?>
+<file path=ppt/slideLayouts/slideLayout5.xml><?xml version="1.0" encoding="utf-8"?>
 <p:sldLayout xmlns:a="http://schemas.openxmlformats.org/drawingml/2006/main" xmlns:r="http://schemas.openxmlformats.org/officeDocument/2006/relationships" xmlns:p="http://schemas.openxmlformats.org/presentationml/2006/main" type="blank">
   <p:cSld name="Blank">
     <p:spTree>
@@ -3311,10 +2944,9 @@
   <p:sldLayoutIdLst>
     <p:sldLayoutId id="2147483649" r:id="rId1"/>
     <p:sldLayoutId id="2147483650" r:id="rId2"/>
-    <p:sldLayoutId id="2147483651" r:id="rId3"/>
-    <p:sldLayoutId id="2147483652" r:id="rId4"/>
-    <p:sldLayoutId id="2147483653" r:id="rId5"/>
-    <p:sldLayoutId id="2147483654" r:id="rId6"/>
+    <p:sldLayoutId id="2147483652" r:id="rId3"/>
+    <p:sldLayoutId id="2147483653" r:id="rId4"/>
+    <p:sldLayoutId id="2147483654" r:id="rId5"/>
   </p:sldLayoutIdLst>
   <p:txStyles>
     <p:titleStyle>
@@ -9388,7 +9020,7 @@
         </p:blipFill>
         <p:spPr>
           <a:xfrm>
-            <a:off x="609600" y="1714500"/>
+            <a:off x="609600" y="1346855"/>
             <a:ext cx="4171950" cy="4314825"/>
           </a:xfrm>
           <a:prstGeom prst="rect">
@@ -9412,7 +9044,7 @@
         </p:nvSpPr>
         <p:spPr>
           <a:xfrm>
-            <a:off x="5438775" y="1695450"/>
+            <a:off x="5438775" y="1395412"/>
             <a:ext cx="6143625" cy="762000"/>
           </a:xfrm>
           <a:prstGeom prst="rect">
@@ -9441,7 +9073,7 @@
               </a:defRPr>
             </a:pPr>
             <a:r>
-              <a:rPr sz="2550" b="1">
+              <a:rPr sz="2550" b="1" dirty="0">
                 <a:solidFill>
                   <a:srgbClr val="FFFFFF"/>
                 </a:solidFill>
@@ -9470,7 +9102,7 @@
         </p:nvSpPr>
         <p:spPr>
           <a:xfrm>
-            <a:off x="5438775" y="2600325"/>
+            <a:off x="5438775" y="1955006"/>
             <a:ext cx="6076950" cy="1181100"/>
           </a:xfrm>
           <a:prstGeom prst="rect">
@@ -9499,7 +9131,7 @@
               </a:defRPr>
             </a:pPr>
             <a:r>
-              <a:rPr sz="2025" b="0">
+              <a:rPr sz="2025" b="0" dirty="0" err="1">
                 <a:solidFill>
                   <a:srgbClr val="C6D4DB"/>
                 </a:solidFill>
@@ -9507,7 +9139,18 @@
                 <a:ea typeface="DejaVu Sans"/>
                 <a:cs typeface="DejaVu Sans"/>
               </a:rPr>
-              <a:t>Heatwatch combines understandable risk categories, validated inputs and temperature analysis in one responsive website.</a:t>
+              <a:t>Heatwatch</a:t>
+            </a:r>
+            <a:r>
+              <a:rPr sz="2025" b="0" dirty="0">
+                <a:solidFill>
+                  <a:srgbClr val="C6D4DB"/>
+                </a:solidFill>
+                <a:latin typeface="DejaVu Sans"/>
+                <a:ea typeface="DejaVu Sans"/>
+                <a:cs typeface="DejaVu Sans"/>
+              </a:rPr>
+              <a:t> combines understandable risk categories, validated inputs and temperature analysis in one responsive website.</a:t>
             </a:r>
           </a:p>
         </p:txBody>
@@ -9528,7 +9171,7 @@
         </p:nvSpPr>
         <p:spPr>
           <a:xfrm>
-            <a:off x="5438775" y="4114800"/>
+            <a:off x="5453062" y="3226592"/>
             <a:ext cx="6048375" cy="495300"/>
           </a:xfrm>
           <a:prstGeom prst="rect">
@@ -9557,7 +9200,7 @@
               </a:defRPr>
             </a:pPr>
             <a:r>
-              <a:rPr sz="2325" b="1">
+              <a:rPr sz="2325" b="1" dirty="0">
                 <a:solidFill>
                   <a:srgbClr val="F3AA77"/>
                 </a:solidFill>
@@ -9586,7 +9229,7 @@
         </p:nvSpPr>
         <p:spPr>
           <a:xfrm>
-            <a:off x="5438775" y="4762500"/>
+            <a:off x="5438775" y="3721895"/>
             <a:ext cx="6000750" cy="1333500"/>
           </a:xfrm>
           <a:prstGeom prst="rect">
@@ -9615,7 +9258,7 @@
               </a:defRPr>
             </a:pPr>
             <a:r>
-              <a:rPr sz="1875" b="0">
+              <a:rPr sz="1875" b="0" dirty="0">
                 <a:solidFill>
                   <a:srgbClr val="C6D4DB"/>
                 </a:solidFill>
@@ -9639,7 +9282,7 @@
               </a:defRPr>
             </a:pPr>
             <a:r>
-              <a:rPr sz="1875" b="0">
+              <a:rPr sz="1875" b="0" dirty="0">
                 <a:solidFill>
                   <a:srgbClr val="C6D4DB"/>
                 </a:solidFill>
@@ -9663,7 +9306,7 @@
               </a:defRPr>
             </a:pPr>
             <a:r>
-              <a:rPr sz="1875" b="0">
+              <a:rPr sz="1875" b="0" dirty="0">
                 <a:solidFill>
                   <a:srgbClr val="C6D4DB"/>
                 </a:solidFill>
@@ -9673,6 +9316,162 @@
               </a:rPr>
               <a:t>Add location-specific official alert criteria.</a:t>
             </a:r>
+            <a:endParaRPr lang="en-US" sz="1875" b="0" dirty="0">
+              <a:solidFill>
+                <a:srgbClr val="C6D4DB"/>
+              </a:solidFill>
+              <a:latin typeface="DejaVu Sans"/>
+              <a:ea typeface="DejaVu Sans"/>
+              <a:cs typeface="DejaVu Sans"/>
+            </a:endParaRPr>
+          </a:p>
+          <a:p>
+            <a:pPr>
+              <a:buNone/>
+              <a:defRPr sz="1875" b="0">
+                <a:solidFill>
+                  <a:srgbClr val="C6D4DB"/>
+                </a:solidFill>
+                <a:latin typeface="DejaVu Sans"/>
+                <a:ea typeface="DejaVu Sans"/>
+                <a:cs typeface="DejaVu Sans"/>
+              </a:defRPr>
+            </a:pPr>
+            <a:endParaRPr lang="en-IN" sz="1875" dirty="0">
+              <a:solidFill>
+                <a:srgbClr val="C6D4DB"/>
+              </a:solidFill>
+              <a:latin typeface="DejaVu Sans"/>
+              <a:ea typeface="DejaVu Sans"/>
+              <a:cs typeface="DejaVu Sans"/>
+            </a:endParaRPr>
+          </a:p>
+          <a:p>
+            <a:pPr>
+              <a:buNone/>
+              <a:defRPr sz="1875" b="0">
+                <a:solidFill>
+                  <a:srgbClr val="C6D4DB"/>
+                </a:solidFill>
+                <a:latin typeface="DejaVu Sans"/>
+                <a:ea typeface="DejaVu Sans"/>
+                <a:cs typeface="DejaVu Sans"/>
+              </a:defRPr>
+            </a:pPr>
+            <a:endParaRPr lang="en-IN" sz="1875" b="0" dirty="0">
+              <a:solidFill>
+                <a:srgbClr val="C6D4DB"/>
+              </a:solidFill>
+              <a:latin typeface="DejaVu Sans"/>
+              <a:ea typeface="DejaVu Sans"/>
+              <a:cs typeface="DejaVu Sans"/>
+            </a:endParaRPr>
+          </a:p>
+          <a:p>
+            <a:pPr>
+              <a:buNone/>
+              <a:defRPr sz="1875" b="0">
+                <a:solidFill>
+                  <a:srgbClr val="C6D4DB"/>
+                </a:solidFill>
+                <a:latin typeface="DejaVu Sans"/>
+                <a:ea typeface="DejaVu Sans"/>
+                <a:cs typeface="DejaVu Sans"/>
+              </a:defRPr>
+            </a:pPr>
+            <a:endParaRPr lang="en-IN" sz="1875" dirty="0">
+              <a:solidFill>
+                <a:srgbClr val="C6D4DB"/>
+              </a:solidFill>
+              <a:latin typeface="DejaVu Sans"/>
+              <a:ea typeface="DejaVu Sans"/>
+              <a:cs typeface="DejaVu Sans"/>
+            </a:endParaRPr>
+          </a:p>
+          <a:p>
+            <a:pPr>
+              <a:buNone/>
+              <a:defRPr sz="1875" b="0">
+                <a:solidFill>
+                  <a:srgbClr val="C6D4DB"/>
+                </a:solidFill>
+                <a:latin typeface="DejaVu Sans"/>
+                <a:ea typeface="DejaVu Sans"/>
+                <a:cs typeface="DejaVu Sans"/>
+              </a:defRPr>
+            </a:pPr>
+            <a:r>
+              <a:rPr lang="en-IN" sz="1875" b="0" dirty="0">
+                <a:solidFill>
+                  <a:srgbClr val="C6D4DB"/>
+                </a:solidFill>
+                <a:latin typeface="DejaVu Sans"/>
+                <a:ea typeface="DejaVu Sans"/>
+                <a:cs typeface="DejaVu Sans"/>
+              </a:rPr>
+              <a:t>GITHUB </a:t>
+            </a:r>
+            <a:r>
+              <a:rPr lang="en-IN" sz="1875" dirty="0">
+                <a:solidFill>
+                  <a:srgbClr val="C6D4DB"/>
+                </a:solidFill>
+                <a:latin typeface="DejaVu Sans"/>
+                <a:ea typeface="DejaVu Sans"/>
+                <a:cs typeface="DejaVu Sans"/>
+              </a:rPr>
+              <a:t>LINK:-</a:t>
+            </a:r>
+            <a:br>
+              <a:rPr lang="en-IN" sz="1875" dirty="0">
+                <a:solidFill>
+                  <a:srgbClr val="C6D4DB"/>
+                </a:solidFill>
+                <a:latin typeface="DejaVu Sans"/>
+                <a:ea typeface="DejaVu Sans"/>
+                <a:cs typeface="DejaVu Sans"/>
+              </a:rPr>
+            </a:br>
+            <a:r>
+              <a:rPr lang="en-IN" sz="1875" dirty="0">
+                <a:solidFill>
+                  <a:srgbClr val="C6D4DB"/>
+                </a:solidFill>
+                <a:latin typeface="DejaVu Sans"/>
+                <a:ea typeface="DejaVu Sans"/>
+                <a:cs typeface="DejaVu Sans"/>
+                <a:hlinkClick r:id="rId4"/>
+              </a:rPr>
+              <a:t>https://github.com/kehandesai/WDL-PPT</a:t>
+            </a:r>
+            <a:br>
+              <a:rPr lang="en-IN" sz="1875" dirty="0">
+                <a:solidFill>
+                  <a:srgbClr val="C6D4DB"/>
+                </a:solidFill>
+                <a:latin typeface="DejaVu Sans"/>
+                <a:ea typeface="DejaVu Sans"/>
+                <a:cs typeface="DejaVu Sans"/>
+              </a:rPr>
+            </a:br>
+            <a:br>
+              <a:rPr lang="en-IN" sz="1875" b="0" dirty="0">
+                <a:solidFill>
+                  <a:srgbClr val="C6D4DB"/>
+                </a:solidFill>
+                <a:latin typeface="DejaVu Sans"/>
+                <a:ea typeface="DejaVu Sans"/>
+                <a:cs typeface="DejaVu Sans"/>
+              </a:rPr>
+            </a:br>
+            <a:endParaRPr lang="en-IN" sz="1875" b="0" dirty="0">
+              <a:solidFill>
+                <a:srgbClr val="C6D4DB"/>
+              </a:solidFill>
+              <a:latin typeface="DejaVu Sans"/>
+              <a:ea typeface="DejaVu Sans"/>
+              <a:cs typeface="DejaVu Sans"/>
+            </a:endParaRPr>
           </a:p>
         </p:txBody>
       </p:sp>
